--- a/Chapter 1 - Java&OOP/JavaOopInterface.pptx
+++ b/Chapter 1 - Java&OOP/JavaOopInterface.pptx
@@ -5,7 +5,7 @@
     <p:sldMasterId id="2147483648" r:id="rId1"/>
   </p:sldMasterIdLst>
   <p:notesMasterIdLst>
-    <p:notesMasterId r:id="rId8"/>
+    <p:notesMasterId r:id="rId7"/>
   </p:notesMasterIdLst>
   <p:sldIdLst>
     <p:sldId id="256" r:id="rId2"/>
@@ -13,17 +13,16 @@
     <p:sldId id="257" r:id="rId4"/>
     <p:sldId id="258" r:id="rId5"/>
     <p:sldId id="284" r:id="rId6"/>
-    <p:sldId id="283" r:id="rId7"/>
   </p:sldIdLst>
   <p:sldSz cx="9144000" cy="5143500" type="screen16x9"/>
   <p:notesSz cx="6858000" cy="9144000"/>
   <p:embeddedFontLst>
     <p:embeddedFont>
       <p:font typeface="Rubik" pitchFamily="2" charset="-79"/>
-      <p:regular r:id="rId9"/>
-      <p:bold r:id="rId10"/>
-      <p:italic r:id="rId11"/>
-      <p:boldItalic r:id="rId12"/>
+      <p:regular r:id="rId8"/>
+      <p:bold r:id="rId9"/>
+      <p:italic r:id="rId10"/>
+      <p:boldItalic r:id="rId11"/>
     </p:embeddedFont>
   </p:embeddedFontLst>
   <p:defaultTextStyle>
@@ -260,7 +259,7 @@
       <p15:sldGuideLst xmlns:p15="http://schemas.microsoft.com/office/powerpoint/2012/main"/>
     </p:ext>
     <p:ext uri="http://customooxmlschemas.google.com/">
-      <go:slidesCustomData xmlns:go="http://customooxmlschemas.google.com/" xmlns:ahyp="http://schemas.microsoft.com/office/drawing/2018/hyperlinkcolor" xmlns:p15="http://schemas.microsoft.com/office/powerpoint/2012/main" xmlns:p14="http://schemas.microsoft.com/office/powerpoint/2010/main" xmlns:com="http://schemas.openxmlformats.org/drawingml/2006/compatibility" xmlns:pvml="urn:schemas-microsoft-com:office:powerpoint" xmlns:v="urn:schemas-microsoft-com:vml" xmlns:o="urn:schemas-microsoft-com:office:office" xmlns:dgm="http://schemas.openxmlformats.org/drawingml/2006/diagram" xmlns:c="http://schemas.openxmlformats.org/drawingml/2006/chart" xmlns:mv="urn:schemas-microsoft-com:mac:vml" xmlns:mc="http://schemas.openxmlformats.org/markup-compatibility/2006" xmlns="" r:id="rId38" roundtripDataSignature="AMtx7mhUVJU3jbxGl11X7yrLJ5REy1msmg=="/>
+      <go:slidesCustomData xmlns="" xmlns:mc="http://schemas.openxmlformats.org/markup-compatibility/2006" xmlns:mv="urn:schemas-microsoft-com:mac:vml" xmlns:c="http://schemas.openxmlformats.org/drawingml/2006/chart" xmlns:dgm="http://schemas.openxmlformats.org/drawingml/2006/diagram" xmlns:o="urn:schemas-microsoft-com:office:office" xmlns:v="urn:schemas-microsoft-com:vml" xmlns:pvml="urn:schemas-microsoft-com:office:powerpoint" xmlns:com="http://schemas.openxmlformats.org/drawingml/2006/compatibility" xmlns:p14="http://schemas.microsoft.com/office/powerpoint/2010/main" xmlns:p15="http://schemas.microsoft.com/office/powerpoint/2012/main" xmlns:ahyp="http://schemas.microsoft.com/office/drawing/2018/hyperlinkcolor" xmlns:go="http://customooxmlschemas.google.com/" r:id="rId38" roundtripDataSignature="AMtx7mhUVJU3jbxGl11X7yrLJ5REy1msmg=="/>
     </p:ext>
   </p:extLst>
 </p:presentation>
@@ -2348,133 +2347,6 @@
     <p:extLst>
       <p:ext uri="{BB962C8B-B14F-4D97-AF65-F5344CB8AC3E}">
         <p14:creationId xmlns:p14="http://schemas.microsoft.com/office/powerpoint/2010/main" val="3226901909"/>
-      </p:ext>
-    </p:extLst>
-  </p:cSld>
-  <p:clrMapOvr>
-    <a:masterClrMapping/>
-  </p:clrMapOvr>
-</p:notes>
-</file>
-
-<file path=ppt/notesSlides/notesSlide6.xml><?xml version="1.0" encoding="utf-8"?>
-<p:notes xmlns:a="http://schemas.openxmlformats.org/drawingml/2006/main" xmlns:r="http://schemas.openxmlformats.org/officeDocument/2006/relationships" xmlns:p="http://schemas.openxmlformats.org/presentationml/2006/main" showMasterSp="0" showMasterPhAnim="0">
-  <p:cSld>
-    <p:spTree>
-      <p:nvGrpSpPr>
-        <p:cNvPr id="1" name="Shape 98"/>
-        <p:cNvGrpSpPr/>
-        <p:nvPr/>
-      </p:nvGrpSpPr>
-      <p:grpSpPr>
-        <a:xfrm>
-          <a:off x="0" y="0"/>
-          <a:ext cx="0" cy="0"/>
-          <a:chOff x="0" y="0"/>
-          <a:chExt cx="0" cy="0"/>
-        </a:xfrm>
-      </p:grpSpPr>
-      <p:sp>
-        <p:nvSpPr>
-          <p:cNvPr id="99" name="Google Shape;99;g9605f3d7aa_0_91:notes"/>
-          <p:cNvSpPr txBox="1">
-            <a:spLocks noGrp="1"/>
-          </p:cNvSpPr>
-          <p:nvPr>
-            <p:ph type="body" idx="1"/>
-          </p:nvPr>
-        </p:nvSpPr>
-        <p:spPr>
-          <a:xfrm>
-            <a:off x="685800" y="4400550"/>
-            <a:ext cx="5486400" cy="3600600"/>
-          </a:xfrm>
-          <a:prstGeom prst="rect">
-            <a:avLst/>
-          </a:prstGeom>
-          <a:noFill/>
-          <a:ln>
-            <a:noFill/>
-          </a:ln>
-        </p:spPr>
-        <p:txBody>
-          <a:bodyPr spcFirstLastPara="1" wrap="square" lIns="91425" tIns="45700" rIns="91425" bIns="45700" anchor="t" anchorCtr="0">
-            <a:noAutofit/>
-          </a:bodyPr>
-          <a:lstStyle/>
-          <a:p>
-            <a:pPr marL="0" lvl="0" indent="0" algn="l" rtl="0">
-              <a:lnSpc>
-                <a:spcPct val="100000"/>
-              </a:lnSpc>
-              <a:spcBef>
-                <a:spcPts val="0"/>
-              </a:spcBef>
-              <a:spcAft>
-                <a:spcPts val="0"/>
-              </a:spcAft>
-              <a:buSzPts val="1400"/>
-              <a:buNone/>
-            </a:pPr>
-            <a:endParaRPr/>
-          </a:p>
-        </p:txBody>
-      </p:sp>
-      <p:sp>
-        <p:nvSpPr>
-          <p:cNvPr id="100" name="Google Shape;100;g9605f3d7aa_0_91:notes"/>
-          <p:cNvSpPr>
-            <a:spLocks noGrp="1" noRot="1" noChangeAspect="1"/>
-          </p:cNvSpPr>
-          <p:nvPr>
-            <p:ph type="sldImg" idx="2"/>
-          </p:nvPr>
-        </p:nvSpPr>
-        <p:spPr>
-          <a:xfrm>
-            <a:off x="685800" y="1143000"/>
-            <a:ext cx="5486400" cy="3086100"/>
-          </a:xfrm>
-          <a:custGeom>
-            <a:avLst/>
-            <a:gdLst/>
-            <a:ahLst/>
-            <a:cxnLst/>
-            <a:rect l="l" t="t" r="r" b="b"/>
-            <a:pathLst>
-              <a:path w="120000" h="120000" extrusionOk="0">
-                <a:moveTo>
-                  <a:pt x="0" y="0"/>
-                </a:moveTo>
-                <a:lnTo>
-                  <a:pt x="120000" y="0"/>
-                </a:lnTo>
-                <a:lnTo>
-                  <a:pt x="120000" y="120000"/>
-                </a:lnTo>
-                <a:lnTo>
-                  <a:pt x="0" y="120000"/>
-                </a:lnTo>
-                <a:close/>
-              </a:path>
-            </a:pathLst>
-          </a:custGeom>
-          <a:noFill/>
-          <a:ln w="12700" cap="flat" cmpd="sng">
-            <a:solidFill>
-              <a:srgbClr val="000000"/>
-            </a:solidFill>
-            <a:prstDash val="solid"/>
-            <a:round/>
-            <a:headEnd type="none" w="sm" len="sm"/>
-            <a:tailEnd type="none" w="sm" len="sm"/>
-          </a:ln>
-        </p:spPr>
-      </p:sp>
-    </p:spTree>
-    <p:extLst>
-      <p:ext uri="{BB962C8B-B14F-4D97-AF65-F5344CB8AC3E}">
-        <p14:creationId xmlns:p14="http://schemas.microsoft.com/office/powerpoint/2010/main" val="1664297704"/>
       </p:ext>
     </p:extLst>
   </p:cSld>
@@ -20331,394 +20203,6 @@
 </p:sld>
 </file>
 
-<file path=ppt/slides/slide6.xml><?xml version="1.0" encoding="utf-8"?>
-<p:sld xmlns:a="http://schemas.openxmlformats.org/drawingml/2006/main" xmlns:r="http://schemas.openxmlformats.org/officeDocument/2006/relationships" xmlns:p="http://schemas.openxmlformats.org/presentationml/2006/main">
-  <p:cSld>
-    <p:spTree>
-      <p:nvGrpSpPr>
-        <p:cNvPr id="1" name="Shape 101"/>
-        <p:cNvGrpSpPr/>
-        <p:nvPr/>
-      </p:nvGrpSpPr>
-      <p:grpSpPr>
-        <a:xfrm>
-          <a:off x="0" y="0"/>
-          <a:ext cx="0" cy="0"/>
-          <a:chOff x="0" y="0"/>
-          <a:chExt cx="0" cy="0"/>
-        </a:xfrm>
-      </p:grpSpPr>
-      <p:grpSp>
-        <p:nvGrpSpPr>
-          <p:cNvPr id="12" name="Google Shape;89;p1">
-            <a:extLst>
-              <a:ext uri="{FF2B5EF4-FFF2-40B4-BE49-F238E27FC236}">
-                <a16:creationId xmlns:a16="http://schemas.microsoft.com/office/drawing/2014/main" id="{A7ADCE01-0604-AC2B-8A5F-F7BB47FC7A4C}"/>
-              </a:ext>
-            </a:extLst>
-          </p:cNvPr>
-          <p:cNvGrpSpPr/>
-          <p:nvPr/>
-        </p:nvGrpSpPr>
-        <p:grpSpPr>
-          <a:xfrm>
-            <a:off x="0" y="0"/>
-            <a:ext cx="9144000" cy="3183773"/>
-            <a:chOff x="0" y="-3301"/>
-            <a:chExt cx="12192000" cy="3840035"/>
-          </a:xfrm>
-        </p:grpSpPr>
-        <p:sp>
-          <p:nvSpPr>
-            <p:cNvPr id="13" name="Google Shape;90;p1">
-              <a:extLst>
-                <a:ext uri="{FF2B5EF4-FFF2-40B4-BE49-F238E27FC236}">
-                  <a16:creationId xmlns:a16="http://schemas.microsoft.com/office/drawing/2014/main" id="{197DB5CE-FCBF-8893-324E-AD37E651D7AA}"/>
-                </a:ext>
-              </a:extLst>
-            </p:cNvPr>
-            <p:cNvSpPr/>
-            <p:nvPr/>
-          </p:nvSpPr>
-          <p:spPr>
-            <a:xfrm>
-              <a:off x="0" y="-3301"/>
-              <a:ext cx="12192000" cy="3840035"/>
-            </a:xfrm>
-            <a:prstGeom prst="rect">
-              <a:avLst/>
-            </a:prstGeom>
-            <a:solidFill>
-              <a:srgbClr val="013471"/>
-            </a:solidFill>
-            <a:ln>
-              <a:noFill/>
-            </a:ln>
-          </p:spPr>
-          <p:txBody>
-            <a:bodyPr spcFirstLastPara="1" wrap="square" lIns="68575" tIns="34275" rIns="68575" bIns="34275" anchor="ctr" anchorCtr="0">
-              <a:noAutofit/>
-            </a:bodyPr>
-            <a:lstStyle/>
-            <a:p>
-              <a:pPr marL="0" marR="0" lvl="0" indent="0" algn="ctr" rtl="1">
-                <a:lnSpc>
-                  <a:spcPct val="100000"/>
-                </a:lnSpc>
-                <a:spcBef>
-                  <a:spcPts val="0"/>
-                </a:spcBef>
-                <a:spcAft>
-                  <a:spcPts val="0"/>
-                </a:spcAft>
-                <a:buClr>
-                  <a:srgbClr val="000000"/>
-                </a:buClr>
-                <a:buSzPts val="1400"/>
-                <a:buFont typeface="Arial"/>
-                <a:buNone/>
-              </a:pPr>
-              <a:endParaRPr sz="1400" b="0" i="0" u="none" strike="noStrike" cap="none">
-                <a:solidFill>
-                  <a:schemeClr val="lt1"/>
-                </a:solidFill>
-                <a:latin typeface="Calibri"/>
-                <a:ea typeface="Calibri"/>
-                <a:cs typeface="Calibri"/>
-                <a:sym typeface="Calibri"/>
-              </a:endParaRPr>
-            </a:p>
-          </p:txBody>
-        </p:sp>
-        <p:sp>
-          <p:nvSpPr>
-            <p:cNvPr id="14" name="Google Shape;91;p1">
-              <a:extLst>
-                <a:ext uri="{FF2B5EF4-FFF2-40B4-BE49-F238E27FC236}">
-                  <a16:creationId xmlns:a16="http://schemas.microsoft.com/office/drawing/2014/main" id="{A43190ED-CA31-8839-309D-FB9B63C3C90E}"/>
-                </a:ext>
-              </a:extLst>
-            </p:cNvPr>
-            <p:cNvSpPr/>
-            <p:nvPr/>
-          </p:nvSpPr>
-          <p:spPr>
-            <a:xfrm>
-              <a:off x="0" y="3590994"/>
-              <a:ext cx="12192000" cy="245122"/>
-            </a:xfrm>
-            <a:prstGeom prst="rect">
-              <a:avLst/>
-            </a:prstGeom>
-            <a:solidFill>
-              <a:schemeClr val="lt1">
-                <a:alpha val="72549"/>
-              </a:schemeClr>
-            </a:solidFill>
-            <a:ln>
-              <a:noFill/>
-            </a:ln>
-          </p:spPr>
-          <p:txBody>
-            <a:bodyPr spcFirstLastPara="1" wrap="square" lIns="68575" tIns="34275" rIns="68575" bIns="34275" anchor="ctr" anchorCtr="0">
-              <a:noAutofit/>
-            </a:bodyPr>
-            <a:lstStyle/>
-            <a:p>
-              <a:pPr marL="0" marR="0" lvl="0" indent="0" algn="ctr" rtl="1">
-                <a:lnSpc>
-                  <a:spcPct val="100000"/>
-                </a:lnSpc>
-                <a:spcBef>
-                  <a:spcPts val="0"/>
-                </a:spcBef>
-                <a:spcAft>
-                  <a:spcPts val="0"/>
-                </a:spcAft>
-                <a:buClr>
-                  <a:srgbClr val="000000"/>
-                </a:buClr>
-                <a:buSzPts val="1400"/>
-                <a:buFont typeface="Arial"/>
-                <a:buNone/>
-              </a:pPr>
-              <a:endParaRPr sz="1400" b="0" i="0" u="none" strike="noStrike" cap="none">
-                <a:solidFill>
-                  <a:schemeClr val="lt1"/>
-                </a:solidFill>
-                <a:latin typeface="Calibri"/>
-                <a:ea typeface="Calibri"/>
-                <a:cs typeface="Calibri"/>
-                <a:sym typeface="Calibri"/>
-              </a:endParaRPr>
-            </a:p>
-          </p:txBody>
-        </p:sp>
-        <p:sp>
-          <p:nvSpPr>
-            <p:cNvPr id="15" name="Google Shape;92;p1">
-              <a:extLst>
-                <a:ext uri="{FF2B5EF4-FFF2-40B4-BE49-F238E27FC236}">
-                  <a16:creationId xmlns:a16="http://schemas.microsoft.com/office/drawing/2014/main" id="{BF5406F8-2983-749B-C606-2DF4D2CD9CE3}"/>
-                </a:ext>
-              </a:extLst>
-            </p:cNvPr>
-            <p:cNvSpPr/>
-            <p:nvPr/>
-          </p:nvSpPr>
-          <p:spPr>
-            <a:xfrm>
-              <a:off x="0" y="3345872"/>
-              <a:ext cx="12192000" cy="245122"/>
-            </a:xfrm>
-            <a:prstGeom prst="rect">
-              <a:avLst/>
-            </a:prstGeom>
-            <a:solidFill>
-              <a:schemeClr val="lt1">
-                <a:alpha val="42352"/>
-              </a:schemeClr>
-            </a:solidFill>
-            <a:ln>
-              <a:noFill/>
-            </a:ln>
-          </p:spPr>
-          <p:txBody>
-            <a:bodyPr spcFirstLastPara="1" wrap="square" lIns="68575" tIns="34275" rIns="68575" bIns="34275" anchor="ctr" anchorCtr="0">
-              <a:noAutofit/>
-            </a:bodyPr>
-            <a:lstStyle/>
-            <a:p>
-              <a:pPr marL="0" marR="0" lvl="0" indent="0" algn="ctr" rtl="1">
-                <a:lnSpc>
-                  <a:spcPct val="100000"/>
-                </a:lnSpc>
-                <a:spcBef>
-                  <a:spcPts val="0"/>
-                </a:spcBef>
-                <a:spcAft>
-                  <a:spcPts val="0"/>
-                </a:spcAft>
-                <a:buClr>
-                  <a:srgbClr val="000000"/>
-                </a:buClr>
-                <a:buSzPts val="1400"/>
-                <a:buFont typeface="Arial"/>
-                <a:buNone/>
-              </a:pPr>
-              <a:endParaRPr sz="1400" b="0" i="0" u="none" strike="noStrike" cap="none">
-                <a:solidFill>
-                  <a:schemeClr val="lt1"/>
-                </a:solidFill>
-                <a:latin typeface="Calibri"/>
-                <a:ea typeface="Calibri"/>
-                <a:cs typeface="Calibri"/>
-                <a:sym typeface="Calibri"/>
-              </a:endParaRPr>
-            </a:p>
-          </p:txBody>
-        </p:sp>
-        <p:sp>
-          <p:nvSpPr>
-            <p:cNvPr id="16" name="Google Shape;93;p1">
-              <a:extLst>
-                <a:ext uri="{FF2B5EF4-FFF2-40B4-BE49-F238E27FC236}">
-                  <a16:creationId xmlns:a16="http://schemas.microsoft.com/office/drawing/2014/main" id="{BE61CB2D-6802-2600-98F4-F5F5F4757D89}"/>
-                </a:ext>
-              </a:extLst>
-            </p:cNvPr>
-            <p:cNvSpPr/>
-            <p:nvPr/>
-          </p:nvSpPr>
-          <p:spPr>
-            <a:xfrm>
-              <a:off x="0" y="3100133"/>
-              <a:ext cx="12192000" cy="245122"/>
-            </a:xfrm>
-            <a:prstGeom prst="rect">
-              <a:avLst/>
-            </a:prstGeom>
-            <a:solidFill>
-              <a:schemeClr val="lt1">
-                <a:alpha val="12549"/>
-              </a:schemeClr>
-            </a:solidFill>
-            <a:ln>
-              <a:noFill/>
-            </a:ln>
-          </p:spPr>
-          <p:txBody>
-            <a:bodyPr spcFirstLastPara="1" wrap="square" lIns="68575" tIns="34275" rIns="68575" bIns="34275" anchor="ctr" anchorCtr="0">
-              <a:noAutofit/>
-            </a:bodyPr>
-            <a:lstStyle/>
-            <a:p>
-              <a:pPr marL="0" marR="0" lvl="0" indent="0" algn="ctr" rtl="1">
-                <a:lnSpc>
-                  <a:spcPct val="100000"/>
-                </a:lnSpc>
-                <a:spcBef>
-                  <a:spcPts val="0"/>
-                </a:spcBef>
-                <a:spcAft>
-                  <a:spcPts val="0"/>
-                </a:spcAft>
-                <a:buClr>
-                  <a:srgbClr val="000000"/>
-                </a:buClr>
-                <a:buSzPts val="1400"/>
-                <a:buFont typeface="Arial"/>
-                <a:buNone/>
-              </a:pPr>
-              <a:endParaRPr sz="1400" b="0" i="0" u="none" strike="noStrike" cap="none">
-                <a:solidFill>
-                  <a:schemeClr val="lt1"/>
-                </a:solidFill>
-                <a:latin typeface="Calibri"/>
-                <a:ea typeface="Calibri"/>
-                <a:cs typeface="Calibri"/>
-                <a:sym typeface="Calibri"/>
-              </a:endParaRPr>
-            </a:p>
-          </p:txBody>
-        </p:sp>
-      </p:grpSp>
-      <p:sp>
-        <p:nvSpPr>
-          <p:cNvPr id="104" name="Google Shape;104;g9605f3d7aa_0_91"/>
-          <p:cNvSpPr txBox="1"/>
-          <p:nvPr/>
-        </p:nvSpPr>
-        <p:spPr>
-          <a:xfrm>
-            <a:off x="1158882" y="1299642"/>
-            <a:ext cx="6826235" cy="1476300"/>
-          </a:xfrm>
-          <a:prstGeom prst="rect">
-            <a:avLst/>
-          </a:prstGeom>
-          <a:noFill/>
-          <a:ln>
-            <a:noFill/>
-          </a:ln>
-        </p:spPr>
-        <p:txBody>
-          <a:bodyPr spcFirstLastPara="1" wrap="square" lIns="91425" tIns="91425" rIns="91425" bIns="91425" anchor="t" anchorCtr="0">
-            <a:noAutofit/>
-          </a:bodyPr>
-          <a:lstStyle/>
-          <a:p>
-            <a:pPr marL="0" lvl="0" indent="0" algn="ctr" rtl="1">
-              <a:spcBef>
-                <a:spcPts val="0"/>
-              </a:spcBef>
-              <a:spcAft>
-                <a:spcPts val="0"/>
-              </a:spcAft>
-              <a:buNone/>
-            </a:pPr>
-            <a:r>
-              <a:rPr lang="he-IL" sz="5400" b="1" dirty="0">
-                <a:solidFill>
-                  <a:schemeClr val="bg1"/>
-                </a:solidFill>
-              </a:rPr>
-              <a:t>תודה על ההקשבה</a:t>
-            </a:r>
-            <a:endParaRPr lang="iw-IL" sz="5400" b="1" dirty="0">
-              <a:solidFill>
-                <a:schemeClr val="bg1"/>
-              </a:solidFill>
-            </a:endParaRPr>
-          </a:p>
-        </p:txBody>
-      </p:sp>
-      <p:pic>
-        <p:nvPicPr>
-          <p:cNvPr id="3" name="Google Shape;88;p1">
-            <a:extLst>
-              <a:ext uri="{FF2B5EF4-FFF2-40B4-BE49-F238E27FC236}">
-                <a16:creationId xmlns:a16="http://schemas.microsoft.com/office/drawing/2014/main" id="{DFD4EF1C-EDD6-8CC1-6F1E-BF6356C4B7DB}"/>
-              </a:ext>
-            </a:extLst>
-          </p:cNvPr>
-          <p:cNvPicPr preferRelativeResize="0"/>
-          <p:nvPr/>
-        </p:nvPicPr>
-        <p:blipFill rotWithShape="1">
-          <a:blip r:embed="rId3">
-            <a:alphaModFix/>
-          </a:blip>
-          <a:srcRect/>
-          <a:stretch/>
-        </p:blipFill>
-        <p:spPr>
-          <a:xfrm>
-            <a:off x="3062190" y="3633734"/>
-            <a:ext cx="2992924" cy="831245"/>
-          </a:xfrm>
-          <a:prstGeom prst="rect">
-            <a:avLst/>
-          </a:prstGeom>
-          <a:noFill/>
-          <a:ln>
-            <a:noFill/>
-          </a:ln>
-        </p:spPr>
-      </p:pic>
-    </p:spTree>
-    <p:extLst>
-      <p:ext uri="{BB962C8B-B14F-4D97-AF65-F5344CB8AC3E}">
-        <p14:creationId xmlns:p14="http://schemas.microsoft.com/office/powerpoint/2010/main" val="3231784974"/>
-      </p:ext>
-    </p:extLst>
-  </p:cSld>
-  <p:clrMapOvr>
-    <a:masterClrMapping/>
-  </p:clrMapOvr>
-</p:sld>
-</file>
-
 <file path=ppt/theme/theme1.xml><?xml version="1.0" encoding="utf-8"?>
 <a:theme xmlns:a="http://schemas.openxmlformats.org/drawingml/2006/main" name="ערכת נושא Office">
   <a:themeElements>
